--- a/10_attention_transformer/excel_attention_transformer_slides.pptx
+++ b/10_attention_transformer/excel_attention_transformer_slides.pptx
@@ -3278,16 +3278,8 @@
           </a:bodyPr>
           <a:lstStyle/>
           <a:p>
-            <a:pPr algn="l">
-              <a:defRPr sz="1500" b="1">
-                <a:solidFill>
-                  <a:srgbClr val="475569"/>
-                </a:solidFill>
-                <a:latin typeface="Yu Gothic"/>
-              </a:defRPr>
-            </a:pPr>
-            <a:r>
-              <a:t>Q/K/V、score、Softmax、Attention weightを総復習する</a:t>
+            <a:r>
+              <a:t>Q/K/VからcontextまでのAttention計算を見る</a:t>
             </a:r>
           </a:p>
         </p:txBody>
@@ -5069,24 +5061,16 @@
           <a:bodyPr rtlCol="0" anchor="ctr" wrap="square" bIns="36576"/>
           <a:lstStyle/>
           <a:p>
-            <a:pPr algn="ctr">
-              <a:defRPr sz="1700" b="1">
-                <a:solidFill>
-                  <a:srgbClr val="276749"/>
-                </a:solidFill>
-                <a:latin typeface="Yu Gothic"/>
-              </a:defRPr>
-            </a:pPr>
-            <a:r>
-              <a:t>まずは</a:t>
+            <a:r>
+              <a:t>qkvから</a:t>
             </a:r>
             <a:br/>
             <a:r>
-              <a:t>基本の表</a:t>
+              <a:t>scores、weights、</a:t>
             </a:r>
             <a:br/>
             <a:r>
-              <a:t>から読む</a:t>
+              <a:t>contextへ読む</a:t>
             </a:r>
           </a:p>
         </p:txBody>
@@ -5542,24 +5526,16 @@
           <a:bodyPr rtlCol="0" anchor="ctr" wrap="square" bIns="36576"/>
           <a:lstStyle/>
           <a:p>
-            <a:pPr algn="ctr">
-              <a:defRPr sz="1700" b="1">
-                <a:solidFill>
-                  <a:srgbClr val="2F6690"/>
-                </a:solidFill>
-                <a:latin typeface="Yu Gothic"/>
-              </a:defRPr>
-            </a:pPr>
-            <a:r>
-              <a:t>列名を</a:t>
+            <a:r>
+              <a:t>score、</a:t>
             </a:r>
             <a:br/>
             <a:r>
-              <a:t>計算の役割に</a:t>
+              <a:t>attention_weight、</a:t>
             </a:r>
             <a:br/>
             <a:r>
-              <a:t>対応づける</a:t>
+              <a:t>weighted_valueを対応づける</a:t>
             </a:r>
           </a:p>
         </p:txBody>
@@ -6015,24 +5991,16 @@
           <a:bodyPr rtlCol="0" anchor="ctr" wrap="square" bIns="36576"/>
           <a:lstStyle/>
           <a:p>
-            <a:pPr algn="ctr">
-              <a:defRPr sz="1700" b="1">
-                <a:solidFill>
-                  <a:srgbClr val="276749"/>
-                </a:solidFill>
-                <a:latin typeface="Yu Gothic"/>
-              </a:defRPr>
-            </a:pPr>
-            <a:r>
-              <a:t>設定を変えたら</a:t>
+            <a:r>
+              <a:t>query_tokenや</a:t>
             </a:r>
             <a:br/>
             <a:r>
-              <a:t>どの列が動くかを</a:t>
+              <a:t>temperatureで</a:t>
             </a:r>
             <a:br/>
             <a:r>
-              <a:t>見る</a:t>
+              <a:t>weightの差を見る</a:t>
             </a:r>
           </a:p>
         </p:txBody>
@@ -6627,16 +6595,8 @@
           <a:bodyPr rtlCol="0" anchor="ctr" wrap="square" bIns="36576"/>
           <a:lstStyle/>
           <a:p>
-            <a:pPr algn="ctr">
-              <a:defRPr sz="1400" b="1">
-                <a:solidFill>
-                  <a:srgbClr val="276749"/>
-                </a:solidFill>
-                <a:latin typeface="Yu Gothic"/>
-              </a:defRPr>
-            </a:pPr>
-            <a:r>
-              <a:t>線形変換でQ/K/Vを作る</a:t>
+            <a:r>
+              <a:t>この回ではQ/K/Vを表で直接確認する</a:t>
             </a:r>
           </a:p>
         </p:txBody>
@@ -6807,16 +6767,8 @@
           <a:bodyPr rtlCol="0" anchor="ctr" wrap="square" bIns="36576"/>
           <a:lstStyle/>
           <a:p>
-            <a:pPr algn="ctr">
-              <a:defRPr sz="1400" b="1">
-                <a:solidFill>
-                  <a:srgbClr val="24324B"/>
-                </a:solidFill>
-                <a:latin typeface="Yu Gothic"/>
-              </a:defRPr>
-            </a:pPr>
-            <a:r>
-              <a:t>Vを重み付きで集める</a:t>
+            <a:r>
+              <a:t>Valueを重み付きで集めてcontextにする</a:t>
             </a:r>
           </a:p>
         </p:txBody>
@@ -7222,16 +7174,8 @@
           <a:bodyPr rtlCol="0" anchor="ctr" wrap="square" bIns="36576"/>
           <a:lstStyle/>
           <a:p>
-            <a:pPr algn="ctr">
-              <a:defRPr sz="1600" b="1">
-                <a:solidFill>
-                  <a:srgbClr val="24324B"/>
-                </a:solidFill>
-                <a:latin typeface="Yu Gothic"/>
-              </a:defRPr>
-            </a:pPr>
-            <a:r>
-              <a:t>小さくしているのは、式と表の対応を見失わないためです。</a:t>
+            <a:r>
+              <a:t>この回ではsingle-headの小さなAttentionに絞ります。multi-head、残差接続、LayerNorm、FFNは扱いません。</a:t>
             </a:r>
           </a:p>
         </p:txBody>
@@ -7569,16 +7513,8 @@
           </a:bodyPr>
           <a:lstStyle/>
           <a:p>
-            <a:pPr algn="ctr">
-              <a:defRPr sz="1800" b="1">
-                <a:solidFill>
-                  <a:srgbClr val="24324B"/>
-                </a:solidFill>
-                <a:latin typeface="Yu Gothic"/>
-              </a:defRPr>
-            </a:pPr>
-            <a:r>
-              <a:t>Q/K/V、score、Softmax、Attention weightを総復習する</a:t>
+            <a:r>
+              <a:t>Q/K/VからcontextまでのAttention計算を見る</a:t>
             </a:r>
           </a:p>
         </p:txBody>
@@ -7703,16 +7639,33 @@
           </a:bodyPr>
           <a:lstStyle/>
           <a:p>
-            <a:pPr algn="l">
-              <a:defRPr sz="2500" b="1">
-                <a:solidFill>
-                  <a:srgbClr val="24324B"/>
-                </a:solidFill>
-                <a:latin typeface="Yu Gothic"/>
-              </a:defRPr>
-            </a:pPr>
             <a:r>
               <a:t>この回の用語</a:t>
+            </a:r>
+          </a:p>
+          <a:p>
+            <a:r>
+              <a:t>Query: 何を探すかを表すベクトル</a:t>
+            </a:r>
+          </a:p>
+          <a:p>
+            <a:r>
+              <a:t>Key: 比較される側のベクトル</a:t>
+            </a:r>
+          </a:p>
+          <a:p>
+            <a:r>
+              <a:t>Value: weightで集める値</a:t>
+            </a:r>
+          </a:p>
+          <a:p>
+            <a:r>
+              <a:t>Attention weight: scoreをSoftmaxした重み</a:t>
+            </a:r>
+          </a:p>
+          <a:p>
+            <a:r>
+              <a:t>Context: Valueの重み付き和</a:t>
             </a:r>
           </a:p>
         </p:txBody>
@@ -8858,16 +8811,8 @@
           <a:bodyPr rtlCol="0" anchor="ctr" wrap="square" bIns="36576"/>
           <a:lstStyle/>
           <a:p>
-            <a:pPr algn="ctr">
-              <a:defRPr sz="1400" b="1">
-                <a:solidFill>
-                  <a:srgbClr val="24324B"/>
-                </a:solidFill>
-                <a:latin typeface="Yu Gothic"/>
-              </a:defRPr>
-            </a:pPr>
-            <a:r>
-              <a:t>どの情報を見るかを重みとして計算する</a:t>
+            <a:r>
+              <a:t>Queryが見るKeyを重みとして計算する</a:t>
             </a:r>
           </a:p>
         </p:txBody>
@@ -8992,16 +8937,8 @@
           </a:bodyPr>
           <a:lstStyle/>
           <a:p>
-            <a:pPr algn="l">
-              <a:defRPr sz="2500" b="1">
-                <a:solidFill>
-                  <a:srgbClr val="24324B"/>
-                </a:solidFill>
-                <a:latin typeface="Yu Gothic"/>
-              </a:defRPr>
-            </a:pPr>
-            <a:r>
-              <a:t>Q/K/V、score、Softmax、Attention weightを総復習する</a:t>
+            <a:r>
+              <a:t>Q/K/VからcontextまでのAttention計算を見る</a:t>
             </a:r>
           </a:p>
         </p:txBody>
@@ -9028,65 +8965,21 @@
           </a:bodyPr>
           <a:lstStyle/>
           <a:p>
-            <a:pPr>
-              <a:spcAft>
-                <a:spcPts val="800"/>
-              </a:spcAft>
-              <a:defRPr sz="1600">
-                <a:solidFill>
-                  <a:srgbClr val="24324B"/>
-                </a:solidFill>
-                <a:latin typeface="Yu Gothic"/>
-              </a:defRPr>
-            </a:pPr>
-            <a:r>
-              <a:t>• Q/K/V、score、Softmax、Attention weightを総復習する</a:t>
-            </a:r>
-          </a:p>
-          <a:p>
-            <a:pPr>
-              <a:spcAft>
-                <a:spcPts val="800"/>
-              </a:spcAft>
-              <a:defRPr sz="1600">
-                <a:solidFill>
-                  <a:srgbClr val="24324B"/>
-                </a:solidFill>
-                <a:latin typeface="Yu Gothic"/>
-              </a:defRPr>
-            </a:pPr>
+            <a:r>
+              <a:t>• Q/K/VからcontextまでのAttention計算を見る</a:t>
+            </a:r>
+          </a:p>
+          <a:p>
             <a:r>
               <a:t>• Excel上の値や設定を変更する</a:t>
             </a:r>
           </a:p>
           <a:p>
-            <a:pPr>
-              <a:spcAft>
-                <a:spcPts val="800"/>
-              </a:spcAft>
-              <a:defRPr sz="1600">
-                <a:solidFill>
-                  <a:srgbClr val="24324B"/>
-                </a:solidFill>
-                <a:latin typeface="Yu Gothic"/>
-              </a:defRPr>
-            </a:pPr>
             <a:r>
               <a:t>• PythonがWorkbookから読み直して計算する</a:t>
             </a:r>
           </a:p>
           <a:p>
-            <a:pPr>
-              <a:spcAft>
-                <a:spcPts val="800"/>
-              </a:spcAft>
-              <a:defRPr sz="1600">
-                <a:solidFill>
-                  <a:srgbClr val="24324B"/>
-                </a:solidFill>
-                <a:latin typeface="Yu Gothic"/>
-              </a:defRPr>
-            </a:pPr>
             <a:r>
               <a:t>• 返却表の列を見て変化を確認する</a:t>
             </a:r>
@@ -9134,21 +9027,13 @@
           <a:bodyPr rtlCol="0" anchor="ctr" wrap="square" bIns="36576"/>
           <a:lstStyle/>
           <a:p>
-            <a:pPr algn="ctr">
-              <a:defRPr sz="1100" b="1">
-                <a:solidFill>
-                  <a:srgbClr val="2F6690"/>
-                </a:solidFill>
-                <a:latin typeface="Yu Gothic"/>
-              </a:defRPr>
-            </a:pPr>
             <a:r>
               <a:t>Attention / Transformerとは</a:t>
             </a:r>
             <a:br/>
             <a:br/>
             <a:r>
-              <a:t>Attentionとは、入力同士の関係を重みとして計算し、必要な情報を選んで集める仕組みです。Transformerの中心部品です。</a:t>
+              <a:t>Attentionとは、QueryとKeyの関係を重みとして計算し、その重みでValueを集める仕組みです。この回ではTransformer全体ではなく、中心になるAttention計算に絞ります。</a:t>
             </a:r>
           </a:p>
         </p:txBody>
@@ -9194,25 +9079,17 @@
           <a:bodyPr rtlCol="0" anchor="ctr" wrap="square" bIns="36576"/>
           <a:lstStyle/>
           <a:p>
-            <a:pPr algn="ctr">
-              <a:defRPr sz="1500" b="1">
-                <a:solidFill>
-                  <a:srgbClr val="276749"/>
-                </a:solidFill>
-                <a:latin typeface="Yu Gothic"/>
-              </a:defRPr>
-            </a:pPr>
             <a:r>
               <a:t>見える変化</a:t>
             </a:r>
             <a:br/>
             <a:br/>
             <a:r>
-              <a:t>token vectors</a:t>
+              <a:t>query_token / temperature</a:t>
             </a:r>
             <a:br/>
             <a:r>
-              <a:t>Q/K/V</a:t>
+              <a:t>weightとcontext</a:t>
             </a:r>
           </a:p>
         </p:txBody>
@@ -10750,20 +10627,12 @@
           <a:bodyPr rtlCol="0" anchor="ctr" wrap="square" bIns="36576"/>
           <a:lstStyle/>
           <a:p>
-            <a:pPr algn="ctr">
-              <a:defRPr sz="1700" b="1">
-                <a:solidFill>
-                  <a:srgbClr val="276749"/>
-                </a:solidFill>
-                <a:latin typeface="Yu Gothic"/>
-              </a:defRPr>
-            </a:pPr>
             <a:r>
               <a:t>weightで</a:t>
             </a:r>
             <a:br/>
             <a:r>
-              <a:t>Vを集める</a:t>
+              <a:t>Valueを集める</a:t>
             </a:r>
           </a:p>
         </p:txBody>
@@ -10809,16 +10678,8 @@
           <a:bodyPr rtlCol="0" anchor="ctr" wrap="square" bIns="36576"/>
           <a:lstStyle/>
           <a:p>
-            <a:pPr algn="ctr">
-              <a:defRPr sz="1400" b="1">
-                <a:solidFill>
-                  <a:srgbClr val="276749"/>
-                </a:solidFill>
-                <a:latin typeface="Yu Gothic"/>
-              </a:defRPr>
-            </a:pPr>
-            <a:r>
-              <a:t>どの情報を見るかを重みとして計算する</a:t>
+            <a:r>
+              <a:t>Queryが見るKeyを重みとして計算する</a:t>
             </a:r>
           </a:p>
         </p:txBody>
@@ -11984,16 +11845,8 @@
           <a:bodyPr rtlCol="0" anchor="ctr" wrap="square" bIns="36576"/>
           <a:lstStyle/>
           <a:p>
-            <a:pPr algn="ctr">
-              <a:defRPr sz="1500" b="1">
-                <a:solidFill>
-                  <a:srgbClr val="24324B"/>
-                </a:solidFill>
-                <a:latin typeface="Yu Gothic"/>
-              </a:defRPr>
-            </a:pPr>
-            <a:r>
-              <a:t>Excelで変更した値が、そのままPythonの計算結果に反映されます。</a:t>
+            <a:r>
+              <a:t>Q/K/Vやquery_tokenを変えると、Attention weightとcontextが変わります。</a:t>
             </a:r>
           </a:p>
         </p:txBody>
@@ -12118,16 +11971,8 @@
           </a:bodyPr>
           <a:lstStyle/>
           <a:p>
-            <a:pPr algn="l">
-              <a:defRPr sz="2500" b="1">
-                <a:solidFill>
-                  <a:srgbClr val="24324B"/>
-                </a:solidFill>
-                <a:latin typeface="Yu Gothic"/>
-              </a:defRPr>
-            </a:pPr>
-            <a:r>
-              <a:t>どこを変えると、どの表が変わるか</a:t>
+            <a:r>
+              <a:t>どこを変えると、Attention weightが変わるか</a:t>
             </a:r>
           </a:p>
         </p:txBody>
@@ -12496,16 +12341,8 @@
           <a:bodyPr rtlCol="0" anchor="ctr" wrap="square" bIns="36576"/>
           <a:lstStyle/>
           <a:p>
-            <a:pPr algn="ctr">
-              <a:defRPr sz="1500" b="1">
-                <a:solidFill>
-                  <a:srgbClr val="276749"/>
-                </a:solidFill>
-                <a:latin typeface="Yu Gothic"/>
-              </a:defRPr>
-            </a:pPr>
-            <a:r>
-              <a:t>操作の目的は、値を変えた時の表の変化を読むことです。</a:t>
+            <a:r>
+              <a:t>QueryとKeyのscore、Softmax後のweight、Valueの加重平均を順に読みます。</a:t>
             </a:r>
           </a:p>
         </p:txBody>
@@ -13806,20 +13643,12 @@
           <a:bodyPr rtlCol="0" anchor="ctr" wrap="square" bIns="36576"/>
           <a:lstStyle/>
           <a:p>
-            <a:pPr algn="ctr">
-              <a:defRPr sz="1800" b="1">
-                <a:solidFill>
-                  <a:srgbClr val="276749"/>
-                </a:solidFill>
-                <a:latin typeface="Yu Gothic"/>
-              </a:defRPr>
-            </a:pPr>
-            <a:r>
-              <a:t>初期値の</a:t>
+            <a:r>
+              <a:t>weightsと</a:t>
             </a:r>
             <a:br/>
             <a:r>
-              <a:t>結果を読む</a:t>
+              <a:t>contextを読む</a:t>
             </a:r>
           </a:p>
         </p:txBody>
